--- a/Online Platform.pptx
+++ b/Online Platform.pptx
@@ -15,6 +15,9 @@
     <p:sldId id="263" r:id="rId9"/>
     <p:sldId id="264" r:id="rId10"/>
     <p:sldId id="265" r:id="rId11"/>
+    <p:sldId id="268" r:id="rId12"/>
+    <p:sldId id="266" r:id="rId13"/>
+    <p:sldId id="267" r:id="rId14"/>
   </p:sldIdLst>
   <p:sldSz cx="12192000" cy="6858000"/>
   <p:notesSz cx="6858000" cy="9144000"/>
@@ -128,6 +131,17 @@
             <p14:sldId id="263"/>
             <p14:sldId id="264"/>
             <p14:sldId id="265"/>
+            <p14:sldId id="268"/>
+          </p14:sldIdLst>
+        </p14:section>
+        <p14:section name="Pattern Table" id="{33970591-2C87-4CBD-94DB-45C5A098F2EF}">
+          <p14:sldIdLst>
+            <p14:sldId id="266"/>
+          </p14:sldIdLst>
+        </p14:section>
+        <p14:section name="DFS" id="{BECC6C8C-5000-4248-97F3-4C7A83E5E042}">
+          <p14:sldIdLst>
+            <p14:sldId id="267"/>
           </p14:sldIdLst>
         </p14:section>
       </p14:sectionLst>
@@ -288,7 +302,7 @@
           <a:p>
             <a:fld id="{97B994F9-6DDE-495C-B28B-4553294D3F27}" type="datetimeFigureOut">
               <a:rPr lang="en-IN" smtClean="0"/>
-              <a:t>08-05-2026</a:t>
+              <a:t>08-06-2026</a:t>
             </a:fld>
             <a:endParaRPr lang="en-IN"/>
           </a:p>
@@ -488,7 +502,7 @@
           <a:p>
             <a:fld id="{97B994F9-6DDE-495C-B28B-4553294D3F27}" type="datetimeFigureOut">
               <a:rPr lang="en-IN" smtClean="0"/>
-              <a:t>08-05-2026</a:t>
+              <a:t>08-06-2026</a:t>
             </a:fld>
             <a:endParaRPr lang="en-IN"/>
           </a:p>
@@ -698,7 +712,7 @@
           <a:p>
             <a:fld id="{97B994F9-6DDE-495C-B28B-4553294D3F27}" type="datetimeFigureOut">
               <a:rPr lang="en-IN" smtClean="0"/>
-              <a:t>08-05-2026</a:t>
+              <a:t>08-06-2026</a:t>
             </a:fld>
             <a:endParaRPr lang="en-IN"/>
           </a:p>
@@ -898,7 +912,7 @@
           <a:p>
             <a:fld id="{97B994F9-6DDE-495C-B28B-4553294D3F27}" type="datetimeFigureOut">
               <a:rPr lang="en-IN" smtClean="0"/>
-              <a:t>08-05-2026</a:t>
+              <a:t>08-06-2026</a:t>
             </a:fld>
             <a:endParaRPr lang="en-IN"/>
           </a:p>
@@ -1174,7 +1188,7 @@
           <a:p>
             <a:fld id="{97B994F9-6DDE-495C-B28B-4553294D3F27}" type="datetimeFigureOut">
               <a:rPr lang="en-IN" smtClean="0"/>
-              <a:t>08-05-2026</a:t>
+              <a:t>08-06-2026</a:t>
             </a:fld>
             <a:endParaRPr lang="en-IN"/>
           </a:p>
@@ -1442,7 +1456,7 @@
           <a:p>
             <a:fld id="{97B994F9-6DDE-495C-B28B-4553294D3F27}" type="datetimeFigureOut">
               <a:rPr lang="en-IN" smtClean="0"/>
-              <a:t>08-05-2026</a:t>
+              <a:t>08-06-2026</a:t>
             </a:fld>
             <a:endParaRPr lang="en-IN"/>
           </a:p>
@@ -1857,7 +1871,7 @@
           <a:p>
             <a:fld id="{97B994F9-6DDE-495C-B28B-4553294D3F27}" type="datetimeFigureOut">
               <a:rPr lang="en-IN" smtClean="0"/>
-              <a:t>08-05-2026</a:t>
+              <a:t>08-06-2026</a:t>
             </a:fld>
             <a:endParaRPr lang="en-IN"/>
           </a:p>
@@ -1999,7 +2013,7 @@
           <a:p>
             <a:fld id="{97B994F9-6DDE-495C-B28B-4553294D3F27}" type="datetimeFigureOut">
               <a:rPr lang="en-IN" smtClean="0"/>
-              <a:t>08-05-2026</a:t>
+              <a:t>08-06-2026</a:t>
             </a:fld>
             <a:endParaRPr lang="en-IN"/>
           </a:p>
@@ -2112,7 +2126,7 @@
           <a:p>
             <a:fld id="{97B994F9-6DDE-495C-B28B-4553294D3F27}" type="datetimeFigureOut">
               <a:rPr lang="en-IN" smtClean="0"/>
-              <a:t>08-05-2026</a:t>
+              <a:t>08-06-2026</a:t>
             </a:fld>
             <a:endParaRPr lang="en-IN"/>
           </a:p>
@@ -2425,7 +2439,7 @@
           <a:p>
             <a:fld id="{97B994F9-6DDE-495C-B28B-4553294D3F27}" type="datetimeFigureOut">
               <a:rPr lang="en-IN" smtClean="0"/>
-              <a:t>08-05-2026</a:t>
+              <a:t>08-06-2026</a:t>
             </a:fld>
             <a:endParaRPr lang="en-IN"/>
           </a:p>
@@ -2714,7 +2728,7 @@
           <a:p>
             <a:fld id="{97B994F9-6DDE-495C-B28B-4553294D3F27}" type="datetimeFigureOut">
               <a:rPr lang="en-IN" smtClean="0"/>
-              <a:t>08-05-2026</a:t>
+              <a:t>08-06-2026</a:t>
             </a:fld>
             <a:endParaRPr lang="en-IN"/>
           </a:p>
@@ -2957,7 +2971,7 @@
           <a:p>
             <a:fld id="{97B994F9-6DDE-495C-B28B-4553294D3F27}" type="datetimeFigureOut">
               <a:rPr lang="en-IN" smtClean="0"/>
-              <a:t>08-05-2026</a:t>
+              <a:t>08-06-2026</a:t>
             </a:fld>
             <a:endParaRPr lang="en-IN"/>
           </a:p>
@@ -4324,6 +4338,1425 @@
 </p:sld>
 </file>
 
+<file path=ppt/slides/slide11.xml><?xml version="1.0" encoding="utf-8"?>
+<p:sld xmlns:a="http://schemas.openxmlformats.org/drawingml/2006/main" xmlns:r="http://schemas.openxmlformats.org/officeDocument/2006/relationships" xmlns:p="http://schemas.openxmlformats.org/presentationml/2006/main">
+  <p:cSld>
+    <p:spTree>
+      <p:nvGrpSpPr>
+        <p:cNvPr id="1" name=""/>
+        <p:cNvGrpSpPr/>
+        <p:nvPr/>
+      </p:nvGrpSpPr>
+      <p:grpSpPr>
+        <a:xfrm>
+          <a:off x="0" y="0"/>
+          <a:ext cx="0" cy="0"/>
+          <a:chOff x="0" y="0"/>
+          <a:chExt cx="0" cy="0"/>
+        </a:xfrm>
+      </p:grpSpPr>
+      <p:pic>
+        <p:nvPicPr>
+          <p:cNvPr id="3" name="Picture 2">
+            <a:extLst>
+              <a:ext uri="{FF2B5EF4-FFF2-40B4-BE49-F238E27FC236}">
+                <a16:creationId xmlns:a16="http://schemas.microsoft.com/office/drawing/2014/main" id="{2D3FD8C6-086E-99B9-5A9E-A855669E5021}"/>
+              </a:ext>
+            </a:extLst>
+          </p:cNvPr>
+          <p:cNvPicPr>
+            <a:picLocks noChangeAspect="1"/>
+          </p:cNvPicPr>
+          <p:nvPr/>
+        </p:nvPicPr>
+        <p:blipFill>
+          <a:blip r:embed="rId2"/>
+          <a:stretch>
+            <a:fillRect/>
+          </a:stretch>
+        </p:blipFill>
+        <p:spPr>
+          <a:xfrm>
+            <a:off x="6178" y="-8092"/>
+            <a:ext cx="6984314" cy="5004000"/>
+          </a:xfrm>
+          <a:prstGeom prst="rect">
+            <a:avLst/>
+          </a:prstGeom>
+        </p:spPr>
+      </p:pic>
+      <p:pic>
+        <p:nvPicPr>
+          <p:cNvPr id="5" name="Picture 4">
+            <a:extLst>
+              <a:ext uri="{FF2B5EF4-FFF2-40B4-BE49-F238E27FC236}">
+                <a16:creationId xmlns:a16="http://schemas.microsoft.com/office/drawing/2014/main" id="{661374EF-E7B9-9EFD-40A7-1A49E7D94CFA}"/>
+              </a:ext>
+            </a:extLst>
+          </p:cNvPr>
+          <p:cNvPicPr>
+            <a:picLocks noChangeAspect="1"/>
+          </p:cNvPicPr>
+          <p:nvPr/>
+        </p:nvPicPr>
+        <p:blipFill>
+          <a:blip r:embed="rId3"/>
+          <a:stretch>
+            <a:fillRect/>
+          </a:stretch>
+        </p:blipFill>
+        <p:spPr>
+          <a:xfrm>
+            <a:off x="7226160" y="1520024"/>
+            <a:ext cx="4366638" cy="3817951"/>
+          </a:xfrm>
+          <a:prstGeom prst="rect">
+            <a:avLst/>
+          </a:prstGeom>
+        </p:spPr>
+      </p:pic>
+    </p:spTree>
+    <p:extLst>
+      <p:ext uri="{BB962C8B-B14F-4D97-AF65-F5344CB8AC3E}">
+        <p14:creationId xmlns:p14="http://schemas.microsoft.com/office/powerpoint/2010/main" val="3457870780"/>
+      </p:ext>
+    </p:extLst>
+  </p:cSld>
+  <p:clrMapOvr>
+    <a:masterClrMapping/>
+  </p:clrMapOvr>
+</p:sld>
+</file>
+
+<file path=ppt/slides/slide12.xml><?xml version="1.0" encoding="utf-8"?>
+<p:sld xmlns:a="http://schemas.openxmlformats.org/drawingml/2006/main" xmlns:r="http://schemas.openxmlformats.org/officeDocument/2006/relationships" xmlns:p="http://schemas.openxmlformats.org/presentationml/2006/main">
+  <p:cSld>
+    <p:spTree>
+      <p:nvGrpSpPr>
+        <p:cNvPr id="1" name=""/>
+        <p:cNvGrpSpPr/>
+        <p:nvPr/>
+      </p:nvGrpSpPr>
+      <p:grpSpPr>
+        <a:xfrm>
+          <a:off x="0" y="0"/>
+          <a:ext cx="0" cy="0"/>
+          <a:chOff x="0" y="0"/>
+          <a:chExt cx="0" cy="0"/>
+        </a:xfrm>
+      </p:grpSpPr>
+      <p:graphicFrame>
+        <p:nvGraphicFramePr>
+          <p:cNvPr id="2" name="Table 1">
+            <a:extLst>
+              <a:ext uri="{FF2B5EF4-FFF2-40B4-BE49-F238E27FC236}">
+                <a16:creationId xmlns:a16="http://schemas.microsoft.com/office/drawing/2014/main" id="{A35BCB5B-A90F-D03D-EF45-866CC892BCD6}"/>
+              </a:ext>
+            </a:extLst>
+          </p:cNvPr>
+          <p:cNvGraphicFramePr>
+            <a:graphicFrameLocks noGrp="1"/>
+          </p:cNvGraphicFramePr>
+          <p:nvPr>
+            <p:extLst>
+              <p:ext uri="{D42A27DB-BD31-4B8C-83A1-F6EECF244321}">
+                <p14:modId xmlns:p14="http://schemas.microsoft.com/office/powerpoint/2010/main" val="1325610801"/>
+              </p:ext>
+            </p:extLst>
+          </p:nvPr>
+        </p:nvGraphicFramePr>
+        <p:xfrm>
+          <a:off x="235974" y="255639"/>
+          <a:ext cx="11562738" cy="6390960"/>
+        </p:xfrm>
+        <a:graphic>
+          <a:graphicData uri="http://schemas.openxmlformats.org/drawingml/2006/table">
+            <a:tbl>
+              <a:tblPr>
+                <a:tableStyleId>{5940675A-B579-460E-94D1-54222C63F5DA}</a:tableStyleId>
+              </a:tblPr>
+              <a:tblGrid>
+                <a:gridCol w="3854246">
+                  <a:extLst>
+                    <a:ext uri="{9D8B030D-6E8A-4147-A177-3AD203B41FA5}">
+                      <a16:colId xmlns:a16="http://schemas.microsoft.com/office/drawing/2014/main" val="2159789536"/>
+                    </a:ext>
+                  </a:extLst>
+                </a:gridCol>
+                <a:gridCol w="3854246">
+                  <a:extLst>
+                    <a:ext uri="{9D8B030D-6E8A-4147-A177-3AD203B41FA5}">
+                      <a16:colId xmlns:a16="http://schemas.microsoft.com/office/drawing/2014/main" val="1829843254"/>
+                    </a:ext>
+                  </a:extLst>
+                </a:gridCol>
+                <a:gridCol w="3854246">
+                  <a:extLst>
+                    <a:ext uri="{9D8B030D-6E8A-4147-A177-3AD203B41FA5}">
+                      <a16:colId xmlns:a16="http://schemas.microsoft.com/office/drawing/2014/main" val="2514261738"/>
+                    </a:ext>
+                  </a:extLst>
+                </a:gridCol>
+              </a:tblGrid>
+              <a:tr h="545571">
+                <a:tc>
+                  <a:txBody>
+                    <a:bodyPr/>
+                    <a:lstStyle/>
+                    <a:p>
+                      <a:pPr algn="ctr">
+                        <a:buNone/>
+                      </a:pPr>
+                      <a:r>
+                        <a:rPr lang="en-IN" sz="1400" b="1" dirty="0"/>
+                        <a:t>If the question says...</a:t>
+                      </a:r>
+                    </a:p>
+                  </a:txBody>
+                  <a:tcPr marL="53065" marR="53065" marT="26533" marB="26533" anchor="ctr"/>
+                </a:tc>
+                <a:tc>
+                  <a:txBody>
+                    <a:bodyPr/>
+                    <a:lstStyle/>
+                    <a:p>
+                      <a:pPr algn="ctr">
+                        <a:buNone/>
+                      </a:pPr>
+                      <a:r>
+                        <a:rPr lang="en-IN" sz="1400" b="1" dirty="0"/>
+                        <a:t>Think...</a:t>
+                      </a:r>
+                    </a:p>
+                  </a:txBody>
+                  <a:tcPr marL="53065" marR="53065" marT="26533" marB="26533" anchor="ctr"/>
+                </a:tc>
+                <a:tc>
+                  <a:txBody>
+                    <a:bodyPr/>
+                    <a:lstStyle/>
+                    <a:p>
+                      <a:pPr algn="ctr">
+                        <a:buNone/>
+                      </a:pPr>
+                      <a:r>
+                        <a:rPr lang="en-IN" sz="1400" b="1" dirty="0"/>
+                        <a:t>Common Data Structure/Algorithm</a:t>
+                      </a:r>
+                    </a:p>
+                  </a:txBody>
+                  <a:tcPr marL="53065" marR="53065" marT="26533" marB="26533" anchor="ctr"/>
+                </a:tc>
+                <a:extLst>
+                  <a:ext uri="{0D108BD9-81ED-4DB2-BD59-A6C34878D82A}">
+                    <a16:rowId xmlns:a16="http://schemas.microsoft.com/office/drawing/2014/main" val="1842718067"/>
+                  </a:ext>
+                </a:extLst>
+              </a:tr>
+              <a:tr h="311754">
+                <a:tc>
+                  <a:txBody>
+                    <a:bodyPr/>
+                    <a:lstStyle/>
+                    <a:p>
+                      <a:pPr algn="ctr">
+                        <a:buNone/>
+                      </a:pPr>
+                      <a:r>
+                        <a:rPr lang="en-US" sz="1000"/>
+                        <a:t>Find pair with given sum</a:t>
+                      </a:r>
+                    </a:p>
+                  </a:txBody>
+                  <a:tcPr marL="53065" marR="53065" marT="26533" marB="26533" anchor="ctr"/>
+                </a:tc>
+                <a:tc>
+                  <a:txBody>
+                    <a:bodyPr/>
+                    <a:lstStyle/>
+                    <a:p>
+                      <a:pPr algn="ctr">
+                        <a:buNone/>
+                      </a:pPr>
+                      <a:r>
+                        <a:rPr lang="en-IN" sz="1000"/>
+                        <a:t>Need fast lookup</a:t>
+                      </a:r>
+                    </a:p>
+                  </a:txBody>
+                  <a:tcPr marL="53065" marR="53065" marT="26533" marB="26533" anchor="ctr"/>
+                </a:tc>
+                <a:tc>
+                  <a:txBody>
+                    <a:bodyPr/>
+                    <a:lstStyle/>
+                    <a:p>
+                      <a:pPr algn="ctr">
+                        <a:buNone/>
+                      </a:pPr>
+                      <a:r>
+                        <a:rPr lang="en-IN" sz="1000"/>
+                        <a:t>Hash Map</a:t>
+                      </a:r>
+                    </a:p>
+                  </a:txBody>
+                  <a:tcPr marL="53065" marR="53065" marT="26533" marB="26533" anchor="ctr"/>
+                </a:tc>
+                <a:extLst>
+                  <a:ext uri="{0D108BD9-81ED-4DB2-BD59-A6C34878D82A}">
+                    <a16:rowId xmlns:a16="http://schemas.microsoft.com/office/drawing/2014/main" val="2523652650"/>
+                  </a:ext>
+                </a:extLst>
+              </a:tr>
+              <a:tr h="311754">
+                <a:tc>
+                  <a:txBody>
+                    <a:bodyPr/>
+                    <a:lstStyle/>
+                    <a:p>
+                      <a:pPr algn="ctr">
+                        <a:buNone/>
+                      </a:pPr>
+                      <a:r>
+                        <a:rPr lang="en-IN" sz="1000"/>
+                        <a:t>Find duplicate element</a:t>
+                      </a:r>
+                    </a:p>
+                  </a:txBody>
+                  <a:tcPr marL="53065" marR="53065" marT="26533" marB="26533" anchor="ctr"/>
+                </a:tc>
+                <a:tc>
+                  <a:txBody>
+                    <a:bodyPr/>
+                    <a:lstStyle/>
+                    <a:p>
+                      <a:pPr algn="ctr">
+                        <a:buNone/>
+                      </a:pPr>
+                      <a:r>
+                        <a:rPr lang="en-IN" sz="1000"/>
+                        <a:t>Track frequency</a:t>
+                      </a:r>
+                    </a:p>
+                  </a:txBody>
+                  <a:tcPr marL="53065" marR="53065" marT="26533" marB="26533" anchor="ctr"/>
+                </a:tc>
+                <a:tc>
+                  <a:txBody>
+                    <a:bodyPr/>
+                    <a:lstStyle/>
+                    <a:p>
+                      <a:pPr algn="ctr">
+                        <a:buNone/>
+                      </a:pPr>
+                      <a:r>
+                        <a:rPr lang="en-IN" sz="1000"/>
+                        <a:t>Hash Map/Set</a:t>
+                      </a:r>
+                    </a:p>
+                  </a:txBody>
+                  <a:tcPr marL="53065" marR="53065" marT="26533" marB="26533" anchor="ctr"/>
+                </a:tc>
+                <a:extLst>
+                  <a:ext uri="{0D108BD9-81ED-4DB2-BD59-A6C34878D82A}">
+                    <a16:rowId xmlns:a16="http://schemas.microsoft.com/office/drawing/2014/main" val="492156262"/>
+                  </a:ext>
+                </a:extLst>
+              </a:tr>
+              <a:tr h="311754">
+                <a:tc>
+                  <a:txBody>
+                    <a:bodyPr/>
+                    <a:lstStyle/>
+                    <a:p>
+                      <a:pPr algn="ctr">
+                        <a:buNone/>
+                      </a:pPr>
+                      <a:r>
+                        <a:rPr lang="en-IN" sz="1000"/>
+                        <a:t>Count occurrences</a:t>
+                      </a:r>
+                    </a:p>
+                  </a:txBody>
+                  <a:tcPr marL="53065" marR="53065" marT="26533" marB="26533" anchor="ctr"/>
+                </a:tc>
+                <a:tc>
+                  <a:txBody>
+                    <a:bodyPr/>
+                    <a:lstStyle/>
+                    <a:p>
+                      <a:pPr algn="ctr">
+                        <a:buNone/>
+                      </a:pPr>
+                      <a:r>
+                        <a:rPr lang="en-IN" sz="1000"/>
+                        <a:t>Frequency counting</a:t>
+                      </a:r>
+                    </a:p>
+                  </a:txBody>
+                  <a:tcPr marL="53065" marR="53065" marT="26533" marB="26533" anchor="ctr"/>
+                </a:tc>
+                <a:tc>
+                  <a:txBody>
+                    <a:bodyPr/>
+                    <a:lstStyle/>
+                    <a:p>
+                      <a:pPr algn="ctr">
+                        <a:buNone/>
+                      </a:pPr>
+                      <a:r>
+                        <a:rPr lang="en-IN" sz="1000"/>
+                        <a:t>Hash Map</a:t>
+                      </a:r>
+                    </a:p>
+                  </a:txBody>
+                  <a:tcPr marL="53065" marR="53065" marT="26533" marB="26533" anchor="ctr"/>
+                </a:tc>
+                <a:extLst>
+                  <a:ext uri="{0D108BD9-81ED-4DB2-BD59-A6C34878D82A}">
+                    <a16:rowId xmlns:a16="http://schemas.microsoft.com/office/drawing/2014/main" val="2929834490"/>
+                  </a:ext>
+                </a:extLst>
+              </a:tr>
+              <a:tr h="311754">
+                <a:tc>
+                  <a:txBody>
+                    <a:bodyPr/>
+                    <a:lstStyle/>
+                    <a:p>
+                      <a:pPr algn="ctr">
+                        <a:buNone/>
+                      </a:pPr>
+                      <a:r>
+                        <a:rPr lang="en-IN" sz="1000"/>
+                        <a:t>Longest/Shortest subarray</a:t>
+                      </a:r>
+                    </a:p>
+                  </a:txBody>
+                  <a:tcPr marL="53065" marR="53065" marT="26533" marB="26533" anchor="ctr"/>
+                </a:tc>
+                <a:tc>
+                  <a:txBody>
+                    <a:bodyPr/>
+                    <a:lstStyle/>
+                    <a:p>
+                      <a:pPr algn="ctr">
+                        <a:buNone/>
+                      </a:pPr>
+                      <a:r>
+                        <a:rPr lang="en-IN" sz="1000"/>
+                        <a:t>Continuous portion of array</a:t>
+                      </a:r>
+                    </a:p>
+                  </a:txBody>
+                  <a:tcPr marL="53065" marR="53065" marT="26533" marB="26533" anchor="ctr"/>
+                </a:tc>
+                <a:tc>
+                  <a:txBody>
+                    <a:bodyPr/>
+                    <a:lstStyle/>
+                    <a:p>
+                      <a:pPr algn="ctr">
+                        <a:buNone/>
+                      </a:pPr>
+                      <a:r>
+                        <a:rPr lang="en-IN" sz="1000"/>
+                        <a:t>Sliding Window</a:t>
+                      </a:r>
+                    </a:p>
+                  </a:txBody>
+                  <a:tcPr marL="53065" marR="53065" marT="26533" marB="26533" anchor="ctr"/>
+                </a:tc>
+                <a:extLst>
+                  <a:ext uri="{0D108BD9-81ED-4DB2-BD59-A6C34878D82A}">
+                    <a16:rowId xmlns:a16="http://schemas.microsoft.com/office/drawing/2014/main" val="458502021"/>
+                  </a:ext>
+                </a:extLst>
+              </a:tr>
+              <a:tr h="311754">
+                <a:tc>
+                  <a:txBody>
+                    <a:bodyPr/>
+                    <a:lstStyle/>
+                    <a:p>
+                      <a:pPr algn="ctr">
+                        <a:buNone/>
+                      </a:pPr>
+                      <a:r>
+                        <a:rPr lang="en-IN" sz="1000"/>
+                        <a:t>Consecutive elements</a:t>
+                      </a:r>
+                    </a:p>
+                  </a:txBody>
+                  <a:tcPr marL="53065" marR="53065" marT="26533" marB="26533" anchor="ctr"/>
+                </a:tc>
+                <a:tc>
+                  <a:txBody>
+                    <a:bodyPr/>
+                    <a:lstStyle/>
+                    <a:p>
+                      <a:pPr algn="ctr">
+                        <a:buNone/>
+                      </a:pPr>
+                      <a:r>
+                        <a:rPr lang="en-IN" sz="1000"/>
+                        <a:t>Moving range</a:t>
+                      </a:r>
+                    </a:p>
+                  </a:txBody>
+                  <a:tcPr marL="53065" marR="53065" marT="26533" marB="26533" anchor="ctr"/>
+                </a:tc>
+                <a:tc>
+                  <a:txBody>
+                    <a:bodyPr/>
+                    <a:lstStyle/>
+                    <a:p>
+                      <a:pPr algn="ctr">
+                        <a:buNone/>
+                      </a:pPr>
+                      <a:r>
+                        <a:rPr lang="en-IN" sz="1000"/>
+                        <a:t>Sliding Window</a:t>
+                      </a:r>
+                    </a:p>
+                  </a:txBody>
+                  <a:tcPr marL="53065" marR="53065" marT="26533" marB="26533" anchor="ctr"/>
+                </a:tc>
+                <a:extLst>
+                  <a:ext uri="{0D108BD9-81ED-4DB2-BD59-A6C34878D82A}">
+                    <a16:rowId xmlns:a16="http://schemas.microsoft.com/office/drawing/2014/main" val="1260373644"/>
+                  </a:ext>
+                </a:extLst>
+              </a:tr>
+              <a:tr h="311754">
+                <a:tc>
+                  <a:txBody>
+                    <a:bodyPr/>
+                    <a:lstStyle/>
+                    <a:p>
+                      <a:pPr algn="ctr">
+                        <a:buNone/>
+                      </a:pPr>
+                      <a:r>
+                        <a:rPr lang="en-IN" sz="1000"/>
+                        <a:t>Sorted array</a:t>
+                      </a:r>
+                    </a:p>
+                  </a:txBody>
+                  <a:tcPr marL="53065" marR="53065" marT="26533" marB="26533" anchor="ctr"/>
+                </a:tc>
+                <a:tc>
+                  <a:txBody>
+                    <a:bodyPr/>
+                    <a:lstStyle/>
+                    <a:p>
+                      <a:pPr algn="ctr">
+                        <a:buNone/>
+                      </a:pPr>
+                      <a:r>
+                        <a:rPr lang="en-IN" sz="1000" dirty="0"/>
+                        <a:t>Use ordering</a:t>
+                      </a:r>
+                    </a:p>
+                  </a:txBody>
+                  <a:tcPr marL="53065" marR="53065" marT="26533" marB="26533" anchor="ctr"/>
+                </a:tc>
+                <a:tc>
+                  <a:txBody>
+                    <a:bodyPr/>
+                    <a:lstStyle/>
+                    <a:p>
+                      <a:pPr algn="ctr">
+                        <a:buNone/>
+                      </a:pPr>
+                      <a:r>
+                        <a:rPr lang="en-IN" sz="1000"/>
+                        <a:t>Two Pointer/Binary Search</a:t>
+                      </a:r>
+                    </a:p>
+                  </a:txBody>
+                  <a:tcPr marL="53065" marR="53065" marT="26533" marB="26533" anchor="ctr"/>
+                </a:tc>
+                <a:extLst>
+                  <a:ext uri="{0D108BD9-81ED-4DB2-BD59-A6C34878D82A}">
+                    <a16:rowId xmlns:a16="http://schemas.microsoft.com/office/drawing/2014/main" val="4085523322"/>
+                  </a:ext>
+                </a:extLst>
+              </a:tr>
+              <a:tr h="311754">
+                <a:tc>
+                  <a:txBody>
+                    <a:bodyPr/>
+                    <a:lstStyle/>
+                    <a:p>
+                      <a:pPr algn="ctr">
+                        <a:buNone/>
+                      </a:pPr>
+                      <a:r>
+                        <a:rPr lang="en-IN" sz="1000"/>
+                        <a:t>Search efficiently</a:t>
+                      </a:r>
+                    </a:p>
+                  </a:txBody>
+                  <a:tcPr marL="53065" marR="53065" marT="26533" marB="26533" anchor="ctr"/>
+                </a:tc>
+                <a:tc>
+                  <a:txBody>
+                    <a:bodyPr/>
+                    <a:lstStyle/>
+                    <a:p>
+                      <a:pPr algn="ctr">
+                        <a:buNone/>
+                      </a:pPr>
+                      <a:r>
+                        <a:rPr lang="en-IN" sz="1000"/>
+                        <a:t>Divide search space</a:t>
+                      </a:r>
+                    </a:p>
+                  </a:txBody>
+                  <a:tcPr marL="53065" marR="53065" marT="26533" marB="26533" anchor="ctr"/>
+                </a:tc>
+                <a:tc>
+                  <a:txBody>
+                    <a:bodyPr/>
+                    <a:lstStyle/>
+                    <a:p>
+                      <a:pPr algn="ctr">
+                        <a:buNone/>
+                      </a:pPr>
+                      <a:r>
+                        <a:rPr lang="en-IN" sz="1000"/>
+                        <a:t>Binary Search</a:t>
+                      </a:r>
+                    </a:p>
+                  </a:txBody>
+                  <a:tcPr marL="53065" marR="53065" marT="26533" marB="26533" anchor="ctr"/>
+                </a:tc>
+                <a:extLst>
+                  <a:ext uri="{0D108BD9-81ED-4DB2-BD59-A6C34878D82A}">
+                    <a16:rowId xmlns:a16="http://schemas.microsoft.com/office/drawing/2014/main" val="4206271797"/>
+                  </a:ext>
+                </a:extLst>
+              </a:tr>
+              <a:tr h="311754">
+                <a:tc>
+                  <a:txBody>
+                    <a:bodyPr/>
+                    <a:lstStyle/>
+                    <a:p>
+                      <a:pPr algn="ctr">
+                        <a:buNone/>
+                      </a:pPr>
+                      <a:r>
+                        <a:rPr lang="en-IN" sz="1000"/>
+                        <a:t>Tree traversal</a:t>
+                      </a:r>
+                    </a:p>
+                  </a:txBody>
+                  <a:tcPr marL="53065" marR="53065" marT="26533" marB="26533" anchor="ctr"/>
+                </a:tc>
+                <a:tc>
+                  <a:txBody>
+                    <a:bodyPr/>
+                    <a:lstStyle/>
+                    <a:p>
+                      <a:pPr algn="ctr">
+                        <a:buNone/>
+                      </a:pPr>
+                      <a:r>
+                        <a:rPr lang="en-IN" sz="1000"/>
+                        <a:t>Visit nodes</a:t>
+                      </a:r>
+                    </a:p>
+                  </a:txBody>
+                  <a:tcPr marL="53065" marR="53065" marT="26533" marB="26533" anchor="ctr"/>
+                </a:tc>
+                <a:tc>
+                  <a:txBody>
+                    <a:bodyPr/>
+                    <a:lstStyle/>
+                    <a:p>
+                      <a:pPr algn="ctr">
+                        <a:buNone/>
+                      </a:pPr>
+                      <a:r>
+                        <a:rPr lang="en-IN" sz="1000"/>
+                        <a:t>DFS/BFS</a:t>
+                      </a:r>
+                    </a:p>
+                  </a:txBody>
+                  <a:tcPr marL="53065" marR="53065" marT="26533" marB="26533" anchor="ctr"/>
+                </a:tc>
+                <a:extLst>
+                  <a:ext uri="{0D108BD9-81ED-4DB2-BD59-A6C34878D82A}">
+                    <a16:rowId xmlns:a16="http://schemas.microsoft.com/office/drawing/2014/main" val="2762322414"/>
+                  </a:ext>
+                </a:extLst>
+              </a:tr>
+              <a:tr h="311754">
+                <a:tc>
+                  <a:txBody>
+                    <a:bodyPr/>
+                    <a:lstStyle/>
+                    <a:p>
+                      <a:pPr algn="ctr">
+                        <a:buNone/>
+                      </a:pPr>
+                      <a:r>
+                        <a:rPr lang="en-IN" sz="1000"/>
+                        <a:t>Level-wise traversal</a:t>
+                      </a:r>
+                    </a:p>
+                  </a:txBody>
+                  <a:tcPr marL="53065" marR="53065" marT="26533" marB="26533" anchor="ctr"/>
+                </a:tc>
+                <a:tc>
+                  <a:txBody>
+                    <a:bodyPr/>
+                    <a:lstStyle/>
+                    <a:p>
+                      <a:pPr algn="ctr">
+                        <a:buNone/>
+                      </a:pPr>
+                      <a:r>
+                        <a:rPr lang="en-US" sz="1000"/>
+                        <a:t>One level at a time</a:t>
+                      </a:r>
+                    </a:p>
+                  </a:txBody>
+                  <a:tcPr marL="53065" marR="53065" marT="26533" marB="26533" anchor="ctr"/>
+                </a:tc>
+                <a:tc>
+                  <a:txBody>
+                    <a:bodyPr/>
+                    <a:lstStyle/>
+                    <a:p>
+                      <a:pPr algn="ctr">
+                        <a:buNone/>
+                      </a:pPr>
+                      <a:r>
+                        <a:rPr lang="en-IN" sz="1000"/>
+                        <a:t>BFS</a:t>
+                      </a:r>
+                    </a:p>
+                  </a:txBody>
+                  <a:tcPr marL="53065" marR="53065" marT="26533" marB="26533" anchor="ctr"/>
+                </a:tc>
+                <a:extLst>
+                  <a:ext uri="{0D108BD9-81ED-4DB2-BD59-A6C34878D82A}">
+                    <a16:rowId xmlns:a16="http://schemas.microsoft.com/office/drawing/2014/main" val="1424121076"/>
+                  </a:ext>
+                </a:extLst>
+              </a:tr>
+              <a:tr h="311754">
+                <a:tc>
+                  <a:txBody>
+                    <a:bodyPr/>
+                    <a:lstStyle/>
+                    <a:p>
+                      <a:pPr algn="ctr">
+                        <a:buNone/>
+                      </a:pPr>
+                      <a:r>
+                        <a:rPr lang="en-US" sz="1000"/>
+                        <a:t>Path from source to destination</a:t>
+                      </a:r>
+                    </a:p>
+                  </a:txBody>
+                  <a:tcPr marL="53065" marR="53065" marT="26533" marB="26533" anchor="ctr"/>
+                </a:tc>
+                <a:tc>
+                  <a:txBody>
+                    <a:bodyPr/>
+                    <a:lstStyle/>
+                    <a:p>
+                      <a:pPr algn="ctr">
+                        <a:buNone/>
+                      </a:pPr>
+                      <a:r>
+                        <a:rPr lang="en-IN" sz="1000"/>
+                        <a:t>Explore routes</a:t>
+                      </a:r>
+                    </a:p>
+                  </a:txBody>
+                  <a:tcPr marL="53065" marR="53065" marT="26533" marB="26533" anchor="ctr"/>
+                </a:tc>
+                <a:tc>
+                  <a:txBody>
+                    <a:bodyPr/>
+                    <a:lstStyle/>
+                    <a:p>
+                      <a:pPr algn="ctr">
+                        <a:buNone/>
+                      </a:pPr>
+                      <a:r>
+                        <a:rPr lang="en-IN" sz="1000"/>
+                        <a:t>DFS/BFS</a:t>
+                      </a:r>
+                    </a:p>
+                  </a:txBody>
+                  <a:tcPr marL="53065" marR="53065" marT="26533" marB="26533" anchor="ctr"/>
+                </a:tc>
+                <a:extLst>
+                  <a:ext uri="{0D108BD9-81ED-4DB2-BD59-A6C34878D82A}">
+                    <a16:rowId xmlns:a16="http://schemas.microsoft.com/office/drawing/2014/main" val="300795126"/>
+                  </a:ext>
+                </a:extLst>
+              </a:tr>
+              <a:tr h="311754">
+                <a:tc>
+                  <a:txBody>
+                    <a:bodyPr/>
+                    <a:lstStyle/>
+                    <a:p>
+                      <a:pPr algn="ctr">
+                        <a:buNone/>
+                      </a:pPr>
+                      <a:r>
+                        <a:rPr lang="en-IN" sz="1000"/>
+                        <a:t>Minimum steps/moves</a:t>
+                      </a:r>
+                    </a:p>
+                  </a:txBody>
+                  <a:tcPr marL="53065" marR="53065" marT="26533" marB="26533" anchor="ctr"/>
+                </a:tc>
+                <a:tc>
+                  <a:txBody>
+                    <a:bodyPr/>
+                    <a:lstStyle/>
+                    <a:p>
+                      <a:pPr algn="ctr">
+                        <a:buNone/>
+                      </a:pPr>
+                      <a:r>
+                        <a:rPr lang="en-IN" sz="1000"/>
+                        <a:t>Shortest route</a:t>
+                      </a:r>
+                    </a:p>
+                  </a:txBody>
+                  <a:tcPr marL="53065" marR="53065" marT="26533" marB="26533" anchor="ctr"/>
+                </a:tc>
+                <a:tc>
+                  <a:txBody>
+                    <a:bodyPr/>
+                    <a:lstStyle/>
+                    <a:p>
+                      <a:pPr algn="ctr">
+                        <a:buNone/>
+                      </a:pPr>
+                      <a:r>
+                        <a:rPr lang="en-IN" sz="1000"/>
+                        <a:t>BFS</a:t>
+                      </a:r>
+                    </a:p>
+                  </a:txBody>
+                  <a:tcPr marL="53065" marR="53065" marT="26533" marB="26533" anchor="ctr"/>
+                </a:tc>
+                <a:extLst>
+                  <a:ext uri="{0D108BD9-81ED-4DB2-BD59-A6C34878D82A}">
+                    <a16:rowId xmlns:a16="http://schemas.microsoft.com/office/drawing/2014/main" val="3293099292"/>
+                  </a:ext>
+                </a:extLst>
+              </a:tr>
+              <a:tr h="311754">
+                <a:tc>
+                  <a:txBody>
+                    <a:bodyPr/>
+                    <a:lstStyle/>
+                    <a:p>
+                      <a:pPr algn="ctr">
+                        <a:buNone/>
+                      </a:pPr>
+                      <a:r>
+                        <a:rPr lang="en-IN" sz="1000"/>
+                        <a:t>All combinations</a:t>
+                      </a:r>
+                    </a:p>
+                  </a:txBody>
+                  <a:tcPr marL="53065" marR="53065" marT="26533" marB="26533" anchor="ctr"/>
+                </a:tc>
+                <a:tc>
+                  <a:txBody>
+                    <a:bodyPr/>
+                    <a:lstStyle/>
+                    <a:p>
+                      <a:pPr algn="ctr">
+                        <a:buNone/>
+                      </a:pPr>
+                      <a:r>
+                        <a:rPr lang="en-IN" sz="1000"/>
+                        <a:t>Generate possibilities</a:t>
+                      </a:r>
+                    </a:p>
+                  </a:txBody>
+                  <a:tcPr marL="53065" marR="53065" marT="26533" marB="26533" anchor="ctr"/>
+                </a:tc>
+                <a:tc>
+                  <a:txBody>
+                    <a:bodyPr/>
+                    <a:lstStyle/>
+                    <a:p>
+                      <a:pPr algn="ctr">
+                        <a:buNone/>
+                      </a:pPr>
+                      <a:r>
+                        <a:rPr lang="en-IN" sz="1000"/>
+                        <a:t>Backtracking</a:t>
+                      </a:r>
+                    </a:p>
+                  </a:txBody>
+                  <a:tcPr marL="53065" marR="53065" marT="26533" marB="26533" anchor="ctr"/>
+                </a:tc>
+                <a:extLst>
+                  <a:ext uri="{0D108BD9-81ED-4DB2-BD59-A6C34878D82A}">
+                    <a16:rowId xmlns:a16="http://schemas.microsoft.com/office/drawing/2014/main" val="680582467"/>
+                  </a:ext>
+                </a:extLst>
+              </a:tr>
+              <a:tr h="311754">
+                <a:tc>
+                  <a:txBody>
+                    <a:bodyPr/>
+                    <a:lstStyle/>
+                    <a:p>
+                      <a:pPr algn="ctr">
+                        <a:buNone/>
+                      </a:pPr>
+                      <a:r>
+                        <a:rPr lang="en-IN" sz="1000"/>
+                        <a:t>All subsets</a:t>
+                      </a:r>
+                    </a:p>
+                  </a:txBody>
+                  <a:tcPr marL="53065" marR="53065" marT="26533" marB="26533" anchor="ctr"/>
+                </a:tc>
+                <a:tc>
+                  <a:txBody>
+                    <a:bodyPr/>
+                    <a:lstStyle/>
+                    <a:p>
+                      <a:pPr algn="ctr">
+                        <a:buNone/>
+                      </a:pPr>
+                      <a:r>
+                        <a:rPr lang="en-IN" sz="1000"/>
+                        <a:t>Generate possibilities</a:t>
+                      </a:r>
+                    </a:p>
+                  </a:txBody>
+                  <a:tcPr marL="53065" marR="53065" marT="26533" marB="26533" anchor="ctr"/>
+                </a:tc>
+                <a:tc>
+                  <a:txBody>
+                    <a:bodyPr/>
+                    <a:lstStyle/>
+                    <a:p>
+                      <a:pPr algn="ctr">
+                        <a:buNone/>
+                      </a:pPr>
+                      <a:r>
+                        <a:rPr lang="en-IN" sz="1000"/>
+                        <a:t>Backtracking</a:t>
+                      </a:r>
+                    </a:p>
+                  </a:txBody>
+                  <a:tcPr marL="53065" marR="53065" marT="26533" marB="26533" anchor="ctr"/>
+                </a:tc>
+                <a:extLst>
+                  <a:ext uri="{0D108BD9-81ED-4DB2-BD59-A6C34878D82A}">
+                    <a16:rowId xmlns:a16="http://schemas.microsoft.com/office/drawing/2014/main" val="2248555945"/>
+                  </a:ext>
+                </a:extLst>
+              </a:tr>
+              <a:tr h="311754">
+                <a:tc>
+                  <a:txBody>
+                    <a:bodyPr/>
+                    <a:lstStyle/>
+                    <a:p>
+                      <a:pPr algn="ctr">
+                        <a:buNone/>
+                      </a:pPr>
+                      <a:r>
+                        <a:rPr lang="en-IN" sz="1000"/>
+                        <a:t>All permutations</a:t>
+                      </a:r>
+                    </a:p>
+                  </a:txBody>
+                  <a:tcPr marL="53065" marR="53065" marT="26533" marB="26533" anchor="ctr"/>
+                </a:tc>
+                <a:tc>
+                  <a:txBody>
+                    <a:bodyPr/>
+                    <a:lstStyle/>
+                    <a:p>
+                      <a:pPr algn="ctr">
+                        <a:buNone/>
+                      </a:pPr>
+                      <a:r>
+                        <a:rPr lang="en-IN" sz="1000"/>
+                        <a:t>Rearrange all ways</a:t>
+                      </a:r>
+                    </a:p>
+                  </a:txBody>
+                  <a:tcPr marL="53065" marR="53065" marT="26533" marB="26533" anchor="ctr"/>
+                </a:tc>
+                <a:tc>
+                  <a:txBody>
+                    <a:bodyPr/>
+                    <a:lstStyle/>
+                    <a:p>
+                      <a:pPr algn="ctr">
+                        <a:buNone/>
+                      </a:pPr>
+                      <a:r>
+                        <a:rPr lang="en-IN" sz="1000"/>
+                        <a:t>Backtracking</a:t>
+                      </a:r>
+                    </a:p>
+                  </a:txBody>
+                  <a:tcPr marL="53065" marR="53065" marT="26533" marB="26533" anchor="ctr"/>
+                </a:tc>
+                <a:extLst>
+                  <a:ext uri="{0D108BD9-81ED-4DB2-BD59-A6C34878D82A}">
+                    <a16:rowId xmlns:a16="http://schemas.microsoft.com/office/drawing/2014/main" val="2407707468"/>
+                  </a:ext>
+                </a:extLst>
+              </a:tr>
+              <a:tr h="311754">
+                <a:tc>
+                  <a:txBody>
+                    <a:bodyPr/>
+                    <a:lstStyle/>
+                    <a:p>
+                      <a:pPr algn="ctr">
+                        <a:buNone/>
+                      </a:pPr>
+                      <a:r>
+                        <a:rPr lang="en-IN" sz="1000"/>
+                        <a:t>Maximum/Minimum profit</a:t>
+                      </a:r>
+                    </a:p>
+                  </a:txBody>
+                  <a:tcPr marL="53065" marR="53065" marT="26533" marB="26533" anchor="ctr"/>
+                </a:tc>
+                <a:tc>
+                  <a:txBody>
+                    <a:bodyPr/>
+                    <a:lstStyle/>
+                    <a:p>
+                      <a:pPr algn="ctr">
+                        <a:buNone/>
+                      </a:pPr>
+                      <a:r>
+                        <a:rPr lang="en-IN" sz="1000"/>
+                        <a:t>Optimization</a:t>
+                      </a:r>
+                    </a:p>
+                  </a:txBody>
+                  <a:tcPr marL="53065" marR="53065" marT="26533" marB="26533" anchor="ctr"/>
+                </a:tc>
+                <a:tc>
+                  <a:txBody>
+                    <a:bodyPr/>
+                    <a:lstStyle/>
+                    <a:p>
+                      <a:pPr algn="ctr">
+                        <a:buNone/>
+                      </a:pPr>
+                      <a:r>
+                        <a:rPr lang="en-IN" sz="1000"/>
+                        <a:t>Greedy/DP</a:t>
+                      </a:r>
+                    </a:p>
+                  </a:txBody>
+                  <a:tcPr marL="53065" marR="53065" marT="26533" marB="26533" anchor="ctr"/>
+                </a:tc>
+                <a:extLst>
+                  <a:ext uri="{0D108BD9-81ED-4DB2-BD59-A6C34878D82A}">
+                    <a16:rowId xmlns:a16="http://schemas.microsoft.com/office/drawing/2014/main" val="1652845126"/>
+                  </a:ext>
+                </a:extLst>
+              </a:tr>
+              <a:tr h="545571">
+                <a:tc>
+                  <a:txBody>
+                    <a:bodyPr/>
+                    <a:lstStyle/>
+                    <a:p>
+                      <a:pPr algn="ctr">
+                        <a:buNone/>
+                      </a:pPr>
+                      <a:r>
+                        <a:rPr lang="en-IN" sz="1000"/>
+                        <a:t>Repeated overlapping calculations</a:t>
+                      </a:r>
+                    </a:p>
+                  </a:txBody>
+                  <a:tcPr marL="53065" marR="53065" marT="26533" marB="26533" anchor="ctr"/>
+                </a:tc>
+                <a:tc>
+                  <a:txBody>
+                    <a:bodyPr/>
+                    <a:lstStyle/>
+                    <a:p>
+                      <a:pPr algn="ctr">
+                        <a:buNone/>
+                      </a:pPr>
+                      <a:r>
+                        <a:rPr lang="en-IN" sz="1000"/>
+                        <a:t>Save results</a:t>
+                      </a:r>
+                    </a:p>
+                  </a:txBody>
+                  <a:tcPr marL="53065" marR="53065" marT="26533" marB="26533" anchor="ctr"/>
+                </a:tc>
+                <a:tc>
+                  <a:txBody>
+                    <a:bodyPr/>
+                    <a:lstStyle/>
+                    <a:p>
+                      <a:pPr algn="ctr">
+                        <a:buNone/>
+                      </a:pPr>
+                      <a:r>
+                        <a:rPr lang="en-IN" sz="1000"/>
+                        <a:t>DP</a:t>
+                      </a:r>
+                    </a:p>
+                  </a:txBody>
+                  <a:tcPr marL="53065" marR="53065" marT="26533" marB="26533" anchor="ctr"/>
+                </a:tc>
+                <a:extLst>
+                  <a:ext uri="{0D108BD9-81ED-4DB2-BD59-A6C34878D82A}">
+                    <a16:rowId xmlns:a16="http://schemas.microsoft.com/office/drawing/2014/main" val="264999445"/>
+                  </a:ext>
+                </a:extLst>
+              </a:tr>
+              <a:tr h="311754">
+                <a:tc>
+                  <a:txBody>
+                    <a:bodyPr/>
+                    <a:lstStyle/>
+                    <a:p>
+                      <a:pPr algn="ctr">
+                        <a:buNone/>
+                      </a:pPr>
+                      <a:r>
+                        <a:rPr lang="en-IN" sz="1000"/>
+                        <a:t>Connected components</a:t>
+                      </a:r>
+                    </a:p>
+                  </a:txBody>
+                  <a:tcPr marL="53065" marR="53065" marT="26533" marB="26533" anchor="ctr"/>
+                </a:tc>
+                <a:tc>
+                  <a:txBody>
+                    <a:bodyPr/>
+                    <a:lstStyle/>
+                    <a:p>
+                      <a:pPr algn="ctr">
+                        <a:buNone/>
+                      </a:pPr>
+                      <a:r>
+                        <a:rPr lang="en-IN" sz="1000"/>
+                        <a:t>Explore network</a:t>
+                      </a:r>
+                    </a:p>
+                  </a:txBody>
+                  <a:tcPr marL="53065" marR="53065" marT="26533" marB="26533" anchor="ctr"/>
+                </a:tc>
+                <a:tc>
+                  <a:txBody>
+                    <a:bodyPr/>
+                    <a:lstStyle/>
+                    <a:p>
+                      <a:pPr algn="ctr">
+                        <a:buNone/>
+                      </a:pPr>
+                      <a:r>
+                        <a:rPr lang="en-IN" sz="1000"/>
+                        <a:t>DFS/BFS</a:t>
+                      </a:r>
+                    </a:p>
+                  </a:txBody>
+                  <a:tcPr marL="53065" marR="53065" marT="26533" marB="26533" anchor="ctr"/>
+                </a:tc>
+                <a:extLst>
+                  <a:ext uri="{0D108BD9-81ED-4DB2-BD59-A6C34878D82A}">
+                    <a16:rowId xmlns:a16="http://schemas.microsoft.com/office/drawing/2014/main" val="4109919237"/>
+                  </a:ext>
+                </a:extLst>
+              </a:tr>
+              <a:tr h="311754">
+                <a:tc>
+                  <a:txBody>
+                    <a:bodyPr/>
+                    <a:lstStyle/>
+                    <a:p>
+                      <a:pPr algn="ctr">
+                        <a:buNone/>
+                      </a:pPr>
+                      <a:r>
+                        <a:rPr lang="en-IN" sz="1000"/>
+                        <a:t>Detect cycle</a:t>
+                      </a:r>
+                    </a:p>
+                  </a:txBody>
+                  <a:tcPr marL="53065" marR="53065" marT="26533" marB="26533" anchor="ctr"/>
+                </a:tc>
+                <a:tc>
+                  <a:txBody>
+                    <a:bodyPr/>
+                    <a:lstStyle/>
+                    <a:p>
+                      <a:pPr algn="ctr">
+                        <a:buNone/>
+                      </a:pPr>
+                      <a:r>
+                        <a:rPr lang="en-IN" sz="1000"/>
+                        <a:t>Check revisits</a:t>
+                      </a:r>
+                    </a:p>
+                  </a:txBody>
+                  <a:tcPr marL="53065" marR="53065" marT="26533" marB="26533" anchor="ctr"/>
+                </a:tc>
+                <a:tc>
+                  <a:txBody>
+                    <a:bodyPr/>
+                    <a:lstStyle/>
+                    <a:p>
+                      <a:pPr algn="ctr">
+                        <a:buNone/>
+                      </a:pPr>
+                      <a:r>
+                        <a:rPr lang="en-IN" sz="1000" dirty="0"/>
+                        <a:t>DFS/Union Find</a:t>
+                      </a:r>
+                    </a:p>
+                  </a:txBody>
+                  <a:tcPr marL="53065" marR="53065" marT="26533" marB="26533" anchor="ctr"/>
+                </a:tc>
+                <a:extLst>
+                  <a:ext uri="{0D108BD9-81ED-4DB2-BD59-A6C34878D82A}">
+                    <a16:rowId xmlns:a16="http://schemas.microsoft.com/office/drawing/2014/main" val="927866743"/>
+                  </a:ext>
+                </a:extLst>
+              </a:tr>
+            </a:tbl>
+          </a:graphicData>
+        </a:graphic>
+      </p:graphicFrame>
+    </p:spTree>
+    <p:extLst>
+      <p:ext uri="{BB962C8B-B14F-4D97-AF65-F5344CB8AC3E}">
+        <p14:creationId xmlns:p14="http://schemas.microsoft.com/office/powerpoint/2010/main" val="1659463967"/>
+      </p:ext>
+    </p:extLst>
+  </p:cSld>
+  <p:clrMapOvr>
+    <a:masterClrMapping/>
+  </p:clrMapOvr>
+</p:sld>
+</file>
+
+<file path=ppt/slides/slide13.xml><?xml version="1.0" encoding="utf-8"?>
+<p:sld xmlns:a="http://schemas.openxmlformats.org/drawingml/2006/main" xmlns:r="http://schemas.openxmlformats.org/officeDocument/2006/relationships" xmlns:p="http://schemas.openxmlformats.org/presentationml/2006/main">
+  <p:cSld>
+    <p:spTree>
+      <p:nvGrpSpPr>
+        <p:cNvPr id="1" name=""/>
+        <p:cNvGrpSpPr/>
+        <p:nvPr/>
+      </p:nvGrpSpPr>
+      <p:grpSpPr>
+        <a:xfrm>
+          <a:off x="0" y="0"/>
+          <a:ext cx="0" cy="0"/>
+          <a:chOff x="0" y="0"/>
+          <a:chExt cx="0" cy="0"/>
+        </a:xfrm>
+      </p:grpSpPr>
+      <p:sp>
+        <p:nvSpPr>
+          <p:cNvPr id="3" name="TextBox 2">
+            <a:extLst>
+              <a:ext uri="{FF2B5EF4-FFF2-40B4-BE49-F238E27FC236}">
+                <a16:creationId xmlns:a16="http://schemas.microsoft.com/office/drawing/2014/main" id="{F49B69A3-F2FE-1411-0638-AE0BEC7C1944}"/>
+              </a:ext>
+            </a:extLst>
+          </p:cNvPr>
+          <p:cNvSpPr txBox="1"/>
+          <p:nvPr/>
+        </p:nvSpPr>
+        <p:spPr>
+          <a:xfrm>
+            <a:off x="1039091" y="1443841"/>
+            <a:ext cx="8102311" cy="3970318"/>
+          </a:xfrm>
+          <a:prstGeom prst="rect">
+            <a:avLst/>
+          </a:prstGeom>
+          <a:noFill/>
+        </p:spPr>
+        <p:txBody>
+          <a:bodyPr wrap="square">
+            <a:spAutoFit/>
+          </a:bodyPr>
+          <a:lstStyle/>
+          <a:p>
+            <a:r>
+              <a:rPr lang="en-IN" dirty="0"/>
+              <a:t>void </a:t>
+            </a:r>
+            <a:r>
+              <a:rPr lang="en-IN" dirty="0" err="1"/>
+              <a:t>dfs</a:t>
+            </a:r>
+            <a:r>
+              <a:rPr lang="en-IN" dirty="0"/>
+              <a:t>(int node)</a:t>
+            </a:r>
+          </a:p>
+          <a:p>
+            <a:r>
+              <a:rPr lang="en-IN" dirty="0"/>
+              <a:t>{</a:t>
+            </a:r>
+          </a:p>
+          <a:p>
+            <a:r>
+              <a:rPr lang="en-IN" dirty="0"/>
+              <a:t>    visited[node] = true;</a:t>
+            </a:r>
+          </a:p>
+          <a:p>
+            <a:endParaRPr lang="en-IN" dirty="0"/>
+          </a:p>
+          <a:p>
+            <a:r>
+              <a:rPr lang="en-IN" dirty="0"/>
+              <a:t>    </a:t>
+            </a:r>
+            <a:r>
+              <a:rPr lang="en-IN" dirty="0" err="1"/>
+              <a:t>cout</a:t>
+            </a:r>
+            <a:r>
+              <a:rPr lang="en-IN" dirty="0"/>
+              <a:t> &lt;&lt; node &lt;&lt; " ";</a:t>
+            </a:r>
+          </a:p>
+          <a:p>
+            <a:endParaRPr lang="en-IN" dirty="0"/>
+          </a:p>
+          <a:p>
+            <a:r>
+              <a:rPr lang="en-IN" dirty="0"/>
+              <a:t>    for(int child : tree[node])</a:t>
+            </a:r>
+          </a:p>
+          <a:p>
+            <a:r>
+              <a:rPr lang="en-IN" dirty="0"/>
+              <a:t>    {</a:t>
+            </a:r>
+          </a:p>
+          <a:p>
+            <a:r>
+              <a:rPr lang="en-IN" dirty="0"/>
+              <a:t>        if(!visited[child])</a:t>
+            </a:r>
+          </a:p>
+          <a:p>
+            <a:r>
+              <a:rPr lang="en-IN" dirty="0"/>
+              <a:t>        {</a:t>
+            </a:r>
+          </a:p>
+          <a:p>
+            <a:r>
+              <a:rPr lang="en-IN" dirty="0"/>
+              <a:t>            </a:t>
+            </a:r>
+            <a:r>
+              <a:rPr lang="en-IN" dirty="0" err="1"/>
+              <a:t>dfs</a:t>
+            </a:r>
+            <a:r>
+              <a:rPr lang="en-IN" dirty="0"/>
+              <a:t>(child);</a:t>
+            </a:r>
+          </a:p>
+          <a:p>
+            <a:r>
+              <a:rPr lang="en-IN" dirty="0"/>
+              <a:t>        }</a:t>
+            </a:r>
+          </a:p>
+          <a:p>
+            <a:r>
+              <a:rPr lang="en-IN" dirty="0"/>
+              <a:t>    }</a:t>
+            </a:r>
+          </a:p>
+          <a:p>
+            <a:r>
+              <a:rPr lang="en-IN" dirty="0"/>
+              <a:t>}</a:t>
+            </a:r>
+          </a:p>
+        </p:txBody>
+      </p:sp>
+      <p:sp>
+        <p:nvSpPr>
+          <p:cNvPr id="5" name="TextBox 4">
+            <a:extLst>
+              <a:ext uri="{FF2B5EF4-FFF2-40B4-BE49-F238E27FC236}">
+                <a16:creationId xmlns:a16="http://schemas.microsoft.com/office/drawing/2014/main" id="{401FCC33-630D-FC9A-276B-1D40B30FC3BC}"/>
+              </a:ext>
+            </a:extLst>
+          </p:cNvPr>
+          <p:cNvSpPr txBox="1"/>
+          <p:nvPr/>
+        </p:nvSpPr>
+        <p:spPr>
+          <a:xfrm>
+            <a:off x="906607" y="636216"/>
+            <a:ext cx="6094268" cy="369332"/>
+          </a:xfrm>
+          <a:prstGeom prst="rect">
+            <a:avLst/>
+          </a:prstGeom>
+          <a:noFill/>
+        </p:spPr>
+        <p:txBody>
+          <a:bodyPr wrap="square">
+            <a:spAutoFit/>
+          </a:bodyPr>
+          <a:lstStyle/>
+          <a:p>
+            <a:r>
+              <a:rPr lang="en-US" dirty="0"/>
+              <a:t>DFS Template You Should Memorize</a:t>
+            </a:r>
+            <a:endParaRPr lang="en-IN" dirty="0"/>
+          </a:p>
+        </p:txBody>
+      </p:sp>
+    </p:spTree>
+    <p:extLst>
+      <p:ext uri="{BB962C8B-B14F-4D97-AF65-F5344CB8AC3E}">
+        <p14:creationId xmlns:p14="http://schemas.microsoft.com/office/powerpoint/2010/main" val="1441687059"/>
+      </p:ext>
+    </p:extLst>
+  </p:cSld>
+  <p:clrMapOvr>
+    <a:masterClrMapping/>
+  </p:clrMapOvr>
+</p:sld>
+</file>
+
 <file path=ppt/slides/slide2.xml><?xml version="1.0" encoding="utf-8"?>
 <p:sld xmlns:a="http://schemas.openxmlformats.org/drawingml/2006/main" xmlns:r="http://schemas.openxmlformats.org/officeDocument/2006/relationships" xmlns:p="http://schemas.openxmlformats.org/presentationml/2006/main">
   <p:cSld>
